--- a/Group Project 1/Expansion of the Epidemic Model and Economic Analysis.pptx
+++ b/Group Project 1/Expansion of the Epidemic Model and Economic Analysis.pptx
@@ -211,7 +211,7 @@
           <a:p>
             <a:fld id="{1F07C78D-91C6-46E5-A984-A680DCBF6357}" type="datetimeFigureOut">
               <a:rPr lang="en-US" smtClean="0"/>
-              <a:t>7/13/2025</a:t>
+              <a:t>7/14/25</a:t>
             </a:fld>
             <a:endParaRPr lang="en-US"/>
           </a:p>
@@ -522,7 +522,10 @@
           <a:bodyPr/>
           <a:lstStyle/>
           <a:p>
-            <a:endParaRPr lang="en-US" dirty="0"/>
+            <a:r>
+              <a:rPr lang="en-US" dirty="0"/>
+              <a:t>Tadhg</a:t>
+            </a:r>
           </a:p>
         </p:txBody>
       </p:sp>
@@ -543,7 +546,7 @@
           <a:p>
             <a:fld id="{A5FAE774-3C86-4ADB-B2ED-16D6A179F828}" type="slidenum">
               <a:rPr lang="en-US" smtClean="0"/>
-              <a:t>2</a:t>
+              <a:t>1</a:t>
             </a:fld>
             <a:endParaRPr lang="en-US"/>
           </a:p>
@@ -552,7 +555,442 @@
     </p:spTree>
     <p:extLst>
       <p:ext uri="{BB962C8B-B14F-4D97-AF65-F5344CB8AC3E}">
-        <p14:creationId xmlns:p14="http://schemas.microsoft.com/office/powerpoint/2010/main" val="1585801558"/>
+        <p14:creationId xmlns:p14="http://schemas.microsoft.com/office/powerpoint/2010/main" val="3092657002"/>
+      </p:ext>
+    </p:extLst>
+  </p:cSld>
+  <p:clrMapOvr>
+    <a:masterClrMapping/>
+  </p:clrMapOvr>
+</p:notes>
+</file>
+
+<file path=ppt/notesSlides/notesSlide10.xml><?xml version="1.0" encoding="utf-8"?>
+<p:notes xmlns:a="http://schemas.openxmlformats.org/drawingml/2006/main" xmlns:r="http://schemas.openxmlformats.org/officeDocument/2006/relationships" xmlns:p="http://schemas.openxmlformats.org/presentationml/2006/main">
+  <p:cSld>
+    <p:spTree>
+      <p:nvGrpSpPr>
+        <p:cNvPr id="1" name=""/>
+        <p:cNvGrpSpPr/>
+        <p:nvPr/>
+      </p:nvGrpSpPr>
+      <p:grpSpPr>
+        <a:xfrm>
+          <a:off x="0" y="0"/>
+          <a:ext cx="0" cy="0"/>
+          <a:chOff x="0" y="0"/>
+          <a:chExt cx="0" cy="0"/>
+        </a:xfrm>
+      </p:grpSpPr>
+      <p:sp>
+        <p:nvSpPr>
+          <p:cNvPr id="2" name="Slide Image Placeholder 1"/>
+          <p:cNvSpPr>
+            <a:spLocks noGrp="1" noRot="1" noChangeAspect="1"/>
+          </p:cNvSpPr>
+          <p:nvPr>
+            <p:ph type="sldImg"/>
+          </p:nvPr>
+        </p:nvSpPr>
+        <p:spPr/>
+      </p:sp>
+      <p:sp>
+        <p:nvSpPr>
+          <p:cNvPr id="3" name="Notes Placeholder 2"/>
+          <p:cNvSpPr>
+            <a:spLocks noGrp="1"/>
+          </p:cNvSpPr>
+          <p:nvPr>
+            <p:ph type="body" idx="1"/>
+          </p:nvPr>
+        </p:nvSpPr>
+        <p:spPr/>
+        <p:txBody>
+          <a:bodyPr/>
+          <a:lstStyle/>
+          <a:p>
+            <a:r>
+              <a:rPr lang="en-US" dirty="0"/>
+              <a:t>Tadhg</a:t>
+            </a:r>
+          </a:p>
+        </p:txBody>
+      </p:sp>
+      <p:sp>
+        <p:nvSpPr>
+          <p:cNvPr id="4" name="Slide Number Placeholder 3"/>
+          <p:cNvSpPr>
+            <a:spLocks noGrp="1"/>
+          </p:cNvSpPr>
+          <p:nvPr>
+            <p:ph type="sldNum" sz="quarter" idx="5"/>
+          </p:nvPr>
+        </p:nvSpPr>
+        <p:spPr/>
+        <p:txBody>
+          <a:bodyPr/>
+          <a:lstStyle/>
+          <a:p>
+            <a:fld id="{A5FAE774-3C86-4ADB-B2ED-16D6A179F828}" type="slidenum">
+              <a:rPr lang="en-US" smtClean="0"/>
+              <a:t>10</a:t>
+            </a:fld>
+            <a:endParaRPr lang="en-US"/>
+          </a:p>
+        </p:txBody>
+      </p:sp>
+    </p:spTree>
+    <p:extLst>
+      <p:ext uri="{BB962C8B-B14F-4D97-AF65-F5344CB8AC3E}">
+        <p14:creationId xmlns:p14="http://schemas.microsoft.com/office/powerpoint/2010/main" val="3319993501"/>
+      </p:ext>
+    </p:extLst>
+  </p:cSld>
+  <p:clrMapOvr>
+    <a:masterClrMapping/>
+  </p:clrMapOvr>
+</p:notes>
+</file>
+
+<file path=ppt/notesSlides/notesSlide11.xml><?xml version="1.0" encoding="utf-8"?>
+<p:notes xmlns:a="http://schemas.openxmlformats.org/drawingml/2006/main" xmlns:r="http://schemas.openxmlformats.org/officeDocument/2006/relationships" xmlns:p="http://schemas.openxmlformats.org/presentationml/2006/main">
+  <p:cSld>
+    <p:spTree>
+      <p:nvGrpSpPr>
+        <p:cNvPr id="1" name=""/>
+        <p:cNvGrpSpPr/>
+        <p:nvPr/>
+      </p:nvGrpSpPr>
+      <p:grpSpPr>
+        <a:xfrm>
+          <a:off x="0" y="0"/>
+          <a:ext cx="0" cy="0"/>
+          <a:chOff x="0" y="0"/>
+          <a:chExt cx="0" cy="0"/>
+        </a:xfrm>
+      </p:grpSpPr>
+      <p:sp>
+        <p:nvSpPr>
+          <p:cNvPr id="2" name="Slide Image Placeholder 1"/>
+          <p:cNvSpPr>
+            <a:spLocks noGrp="1" noRot="1" noChangeAspect="1"/>
+          </p:cNvSpPr>
+          <p:nvPr>
+            <p:ph type="sldImg"/>
+          </p:nvPr>
+        </p:nvSpPr>
+        <p:spPr/>
+      </p:sp>
+      <p:sp>
+        <p:nvSpPr>
+          <p:cNvPr id="3" name="Notes Placeholder 2"/>
+          <p:cNvSpPr>
+            <a:spLocks noGrp="1"/>
+          </p:cNvSpPr>
+          <p:nvPr>
+            <p:ph type="body" idx="1"/>
+          </p:nvPr>
+        </p:nvSpPr>
+        <p:spPr/>
+        <p:txBody>
+          <a:bodyPr/>
+          <a:lstStyle/>
+          <a:p>
+            <a:r>
+              <a:rPr lang="en-US" dirty="0"/>
+              <a:t>Kaylee</a:t>
+            </a:r>
+          </a:p>
+        </p:txBody>
+      </p:sp>
+      <p:sp>
+        <p:nvSpPr>
+          <p:cNvPr id="4" name="Slide Number Placeholder 3"/>
+          <p:cNvSpPr>
+            <a:spLocks noGrp="1"/>
+          </p:cNvSpPr>
+          <p:nvPr>
+            <p:ph type="sldNum" sz="quarter" idx="5"/>
+          </p:nvPr>
+        </p:nvSpPr>
+        <p:spPr/>
+        <p:txBody>
+          <a:bodyPr/>
+          <a:lstStyle/>
+          <a:p>
+            <a:fld id="{A5FAE774-3C86-4ADB-B2ED-16D6A179F828}" type="slidenum">
+              <a:rPr lang="en-US" smtClean="0"/>
+              <a:t>11</a:t>
+            </a:fld>
+            <a:endParaRPr lang="en-US"/>
+          </a:p>
+        </p:txBody>
+      </p:sp>
+    </p:spTree>
+    <p:extLst>
+      <p:ext uri="{BB962C8B-B14F-4D97-AF65-F5344CB8AC3E}">
+        <p14:creationId xmlns:p14="http://schemas.microsoft.com/office/powerpoint/2010/main" val="2271827891"/>
+      </p:ext>
+    </p:extLst>
+  </p:cSld>
+  <p:clrMapOvr>
+    <a:masterClrMapping/>
+  </p:clrMapOvr>
+</p:notes>
+</file>
+
+<file path=ppt/notesSlides/notesSlide12.xml><?xml version="1.0" encoding="utf-8"?>
+<p:notes xmlns:a="http://schemas.openxmlformats.org/drawingml/2006/main" xmlns:r="http://schemas.openxmlformats.org/officeDocument/2006/relationships" xmlns:p="http://schemas.openxmlformats.org/presentationml/2006/main">
+  <p:cSld>
+    <p:spTree>
+      <p:nvGrpSpPr>
+        <p:cNvPr id="1" name=""/>
+        <p:cNvGrpSpPr/>
+        <p:nvPr/>
+      </p:nvGrpSpPr>
+      <p:grpSpPr>
+        <a:xfrm>
+          <a:off x="0" y="0"/>
+          <a:ext cx="0" cy="0"/>
+          <a:chOff x="0" y="0"/>
+          <a:chExt cx="0" cy="0"/>
+        </a:xfrm>
+      </p:grpSpPr>
+      <p:sp>
+        <p:nvSpPr>
+          <p:cNvPr id="2" name="Slide Image Placeholder 1"/>
+          <p:cNvSpPr>
+            <a:spLocks noGrp="1" noRot="1" noChangeAspect="1"/>
+          </p:cNvSpPr>
+          <p:nvPr>
+            <p:ph type="sldImg"/>
+          </p:nvPr>
+        </p:nvSpPr>
+        <p:spPr/>
+      </p:sp>
+      <p:sp>
+        <p:nvSpPr>
+          <p:cNvPr id="3" name="Notes Placeholder 2"/>
+          <p:cNvSpPr>
+            <a:spLocks noGrp="1"/>
+          </p:cNvSpPr>
+          <p:nvPr>
+            <p:ph type="body" idx="1"/>
+          </p:nvPr>
+        </p:nvSpPr>
+        <p:spPr/>
+        <p:txBody>
+          <a:bodyPr/>
+          <a:lstStyle/>
+          <a:p>
+            <a:r>
+              <a:rPr lang="en-US" dirty="0"/>
+              <a:t>Kaylee</a:t>
+            </a:r>
+          </a:p>
+        </p:txBody>
+      </p:sp>
+      <p:sp>
+        <p:nvSpPr>
+          <p:cNvPr id="4" name="Slide Number Placeholder 3"/>
+          <p:cNvSpPr>
+            <a:spLocks noGrp="1"/>
+          </p:cNvSpPr>
+          <p:nvPr>
+            <p:ph type="sldNum" sz="quarter" idx="5"/>
+          </p:nvPr>
+        </p:nvSpPr>
+        <p:spPr/>
+        <p:txBody>
+          <a:bodyPr/>
+          <a:lstStyle/>
+          <a:p>
+            <a:fld id="{A5FAE774-3C86-4ADB-B2ED-16D6A179F828}" type="slidenum">
+              <a:rPr lang="en-US" smtClean="0"/>
+              <a:t>12</a:t>
+            </a:fld>
+            <a:endParaRPr lang="en-US"/>
+          </a:p>
+        </p:txBody>
+      </p:sp>
+    </p:spTree>
+    <p:extLst>
+      <p:ext uri="{BB962C8B-B14F-4D97-AF65-F5344CB8AC3E}">
+        <p14:creationId xmlns:p14="http://schemas.microsoft.com/office/powerpoint/2010/main" val="1221790770"/>
+      </p:ext>
+    </p:extLst>
+  </p:cSld>
+  <p:clrMapOvr>
+    <a:masterClrMapping/>
+  </p:clrMapOvr>
+</p:notes>
+</file>
+
+<file path=ppt/notesSlides/notesSlide13.xml><?xml version="1.0" encoding="utf-8"?>
+<p:notes xmlns:a="http://schemas.openxmlformats.org/drawingml/2006/main" xmlns:r="http://schemas.openxmlformats.org/officeDocument/2006/relationships" xmlns:p="http://schemas.openxmlformats.org/presentationml/2006/main">
+  <p:cSld>
+    <p:spTree>
+      <p:nvGrpSpPr>
+        <p:cNvPr id="1" name=""/>
+        <p:cNvGrpSpPr/>
+        <p:nvPr/>
+      </p:nvGrpSpPr>
+      <p:grpSpPr>
+        <a:xfrm>
+          <a:off x="0" y="0"/>
+          <a:ext cx="0" cy="0"/>
+          <a:chOff x="0" y="0"/>
+          <a:chExt cx="0" cy="0"/>
+        </a:xfrm>
+      </p:grpSpPr>
+      <p:sp>
+        <p:nvSpPr>
+          <p:cNvPr id="2" name="Slide Image Placeholder 1"/>
+          <p:cNvSpPr>
+            <a:spLocks noGrp="1" noRot="1" noChangeAspect="1"/>
+          </p:cNvSpPr>
+          <p:nvPr>
+            <p:ph type="sldImg"/>
+          </p:nvPr>
+        </p:nvSpPr>
+        <p:spPr/>
+      </p:sp>
+      <p:sp>
+        <p:nvSpPr>
+          <p:cNvPr id="3" name="Notes Placeholder 2"/>
+          <p:cNvSpPr>
+            <a:spLocks noGrp="1"/>
+          </p:cNvSpPr>
+          <p:nvPr>
+            <p:ph type="body" idx="1"/>
+          </p:nvPr>
+        </p:nvSpPr>
+        <p:spPr/>
+        <p:txBody>
+          <a:bodyPr/>
+          <a:lstStyle/>
+          <a:p>
+            <a:r>
+              <a:rPr lang="en-US" dirty="0"/>
+              <a:t>Tadhg</a:t>
+            </a:r>
+          </a:p>
+        </p:txBody>
+      </p:sp>
+      <p:sp>
+        <p:nvSpPr>
+          <p:cNvPr id="4" name="Slide Number Placeholder 3"/>
+          <p:cNvSpPr>
+            <a:spLocks noGrp="1"/>
+          </p:cNvSpPr>
+          <p:nvPr>
+            <p:ph type="sldNum" sz="quarter" idx="5"/>
+          </p:nvPr>
+        </p:nvSpPr>
+        <p:spPr/>
+        <p:txBody>
+          <a:bodyPr/>
+          <a:lstStyle/>
+          <a:p>
+            <a:fld id="{A5FAE774-3C86-4ADB-B2ED-16D6A179F828}" type="slidenum">
+              <a:rPr lang="en-US" smtClean="0"/>
+              <a:t>13</a:t>
+            </a:fld>
+            <a:endParaRPr lang="en-US"/>
+          </a:p>
+        </p:txBody>
+      </p:sp>
+    </p:spTree>
+    <p:extLst>
+      <p:ext uri="{BB962C8B-B14F-4D97-AF65-F5344CB8AC3E}">
+        <p14:creationId xmlns:p14="http://schemas.microsoft.com/office/powerpoint/2010/main" val="1054537762"/>
+      </p:ext>
+    </p:extLst>
+  </p:cSld>
+  <p:clrMapOvr>
+    <a:masterClrMapping/>
+  </p:clrMapOvr>
+</p:notes>
+</file>
+
+<file path=ppt/notesSlides/notesSlide14.xml><?xml version="1.0" encoding="utf-8"?>
+<p:notes xmlns:a="http://schemas.openxmlformats.org/drawingml/2006/main" xmlns:r="http://schemas.openxmlformats.org/officeDocument/2006/relationships" xmlns:p="http://schemas.openxmlformats.org/presentationml/2006/main">
+  <p:cSld>
+    <p:spTree>
+      <p:nvGrpSpPr>
+        <p:cNvPr id="1" name=""/>
+        <p:cNvGrpSpPr/>
+        <p:nvPr/>
+      </p:nvGrpSpPr>
+      <p:grpSpPr>
+        <a:xfrm>
+          <a:off x="0" y="0"/>
+          <a:ext cx="0" cy="0"/>
+          <a:chOff x="0" y="0"/>
+          <a:chExt cx="0" cy="0"/>
+        </a:xfrm>
+      </p:grpSpPr>
+      <p:sp>
+        <p:nvSpPr>
+          <p:cNvPr id="2" name="Slide Image Placeholder 1"/>
+          <p:cNvSpPr>
+            <a:spLocks noGrp="1" noRot="1" noChangeAspect="1"/>
+          </p:cNvSpPr>
+          <p:nvPr>
+            <p:ph type="sldImg"/>
+          </p:nvPr>
+        </p:nvSpPr>
+        <p:spPr/>
+      </p:sp>
+      <p:sp>
+        <p:nvSpPr>
+          <p:cNvPr id="3" name="Notes Placeholder 2"/>
+          <p:cNvSpPr>
+            <a:spLocks noGrp="1"/>
+          </p:cNvSpPr>
+          <p:nvPr>
+            <p:ph type="body" idx="1"/>
+          </p:nvPr>
+        </p:nvSpPr>
+        <p:spPr/>
+        <p:txBody>
+          <a:bodyPr/>
+          <a:lstStyle/>
+          <a:p>
+            <a:r>
+              <a:rPr lang="en-US" dirty="0"/>
+              <a:t>Tadhg</a:t>
+            </a:r>
+          </a:p>
+        </p:txBody>
+      </p:sp>
+      <p:sp>
+        <p:nvSpPr>
+          <p:cNvPr id="4" name="Slide Number Placeholder 3"/>
+          <p:cNvSpPr>
+            <a:spLocks noGrp="1"/>
+          </p:cNvSpPr>
+          <p:nvPr>
+            <p:ph type="sldNum" sz="quarter" idx="5"/>
+          </p:nvPr>
+        </p:nvSpPr>
+        <p:spPr/>
+        <p:txBody>
+          <a:bodyPr/>
+          <a:lstStyle/>
+          <a:p>
+            <a:fld id="{A5FAE774-3C86-4ADB-B2ED-16D6A179F828}" type="slidenum">
+              <a:rPr lang="en-US" smtClean="0"/>
+              <a:t>15</a:t>
+            </a:fld>
+            <a:endParaRPr lang="en-US"/>
+          </a:p>
+        </p:txBody>
+      </p:sp>
+    </p:spTree>
+    <p:extLst>
+      <p:ext uri="{BB962C8B-B14F-4D97-AF65-F5344CB8AC3E}">
+        <p14:creationId xmlns:p14="http://schemas.microsoft.com/office/powerpoint/2010/main" val="2547155292"/>
       </p:ext>
     </p:extLst>
   </p:cSld>
@@ -606,6 +1044,29 @@
           <a:bodyPr/>
           <a:lstStyle/>
           <a:p>
+            <a:pPr marL="0" marR="0" lvl="0" indent="0" algn="l" defTabSz="914400" rtl="0" eaLnBrk="1" fontAlgn="auto" latinLnBrk="0" hangingPunct="1">
+              <a:lnSpc>
+                <a:spcPct val="100000"/>
+              </a:lnSpc>
+              <a:spcBef>
+                <a:spcPts val="0"/>
+              </a:spcBef>
+              <a:spcAft>
+                <a:spcPts val="0"/>
+              </a:spcAft>
+              <a:buClrTx/>
+              <a:buSzTx/>
+              <a:buFontTx/>
+              <a:buNone/>
+              <a:tabLst/>
+              <a:defRPr/>
+            </a:pPr>
+            <a:r>
+              <a:rPr lang="en-US" dirty="0"/>
+              <a:t>Tadhg</a:t>
+            </a:r>
+          </a:p>
+          <a:p>
             <a:endParaRPr lang="en-US" dirty="0"/>
           </a:p>
         </p:txBody>
@@ -627,6 +1088,307 @@
           <a:p>
             <a:fld id="{A5FAE774-3C86-4ADB-B2ED-16D6A179F828}" type="slidenum">
               <a:rPr lang="en-US" smtClean="0"/>
+              <a:t>2</a:t>
+            </a:fld>
+            <a:endParaRPr lang="en-US"/>
+          </a:p>
+        </p:txBody>
+      </p:sp>
+    </p:spTree>
+    <p:extLst>
+      <p:ext uri="{BB962C8B-B14F-4D97-AF65-F5344CB8AC3E}">
+        <p14:creationId xmlns:p14="http://schemas.microsoft.com/office/powerpoint/2010/main" val="1585801558"/>
+      </p:ext>
+    </p:extLst>
+  </p:cSld>
+  <p:clrMapOvr>
+    <a:masterClrMapping/>
+  </p:clrMapOvr>
+</p:notes>
+</file>
+
+<file path=ppt/notesSlides/notesSlide3.xml><?xml version="1.0" encoding="utf-8"?>
+<p:notes xmlns:a="http://schemas.openxmlformats.org/drawingml/2006/main" xmlns:r="http://schemas.openxmlformats.org/officeDocument/2006/relationships" xmlns:p="http://schemas.openxmlformats.org/presentationml/2006/main">
+  <p:cSld>
+    <p:spTree>
+      <p:nvGrpSpPr>
+        <p:cNvPr id="1" name=""/>
+        <p:cNvGrpSpPr/>
+        <p:nvPr/>
+      </p:nvGrpSpPr>
+      <p:grpSpPr>
+        <a:xfrm>
+          <a:off x="0" y="0"/>
+          <a:ext cx="0" cy="0"/>
+          <a:chOff x="0" y="0"/>
+          <a:chExt cx="0" cy="0"/>
+        </a:xfrm>
+      </p:grpSpPr>
+      <p:sp>
+        <p:nvSpPr>
+          <p:cNvPr id="2" name="Slide Image Placeholder 1"/>
+          <p:cNvSpPr>
+            <a:spLocks noGrp="1" noRot="1" noChangeAspect="1"/>
+          </p:cNvSpPr>
+          <p:nvPr>
+            <p:ph type="sldImg"/>
+          </p:nvPr>
+        </p:nvSpPr>
+        <p:spPr/>
+      </p:sp>
+      <p:sp>
+        <p:nvSpPr>
+          <p:cNvPr id="3" name="Notes Placeholder 2"/>
+          <p:cNvSpPr>
+            <a:spLocks noGrp="1"/>
+          </p:cNvSpPr>
+          <p:nvPr>
+            <p:ph type="body" idx="1"/>
+          </p:nvPr>
+        </p:nvSpPr>
+        <p:spPr/>
+        <p:txBody>
+          <a:bodyPr/>
+          <a:lstStyle/>
+          <a:p>
+            <a:pPr marL="0" marR="0" lvl="0" indent="0" algn="l" defTabSz="914400" rtl="0" eaLnBrk="1" fontAlgn="auto" latinLnBrk="0" hangingPunct="1">
+              <a:lnSpc>
+                <a:spcPct val="100000"/>
+              </a:lnSpc>
+              <a:spcBef>
+                <a:spcPts val="0"/>
+              </a:spcBef>
+              <a:spcAft>
+                <a:spcPts val="0"/>
+              </a:spcAft>
+              <a:buClrTx/>
+              <a:buSzTx/>
+              <a:buFontTx/>
+              <a:buNone/>
+              <a:tabLst/>
+              <a:defRPr/>
+            </a:pPr>
+            <a:r>
+              <a:rPr lang="en-US" dirty="0"/>
+              <a:t>Tadhg</a:t>
+            </a:r>
+          </a:p>
+          <a:p>
+            <a:endParaRPr lang="en-US" dirty="0"/>
+          </a:p>
+        </p:txBody>
+      </p:sp>
+      <p:sp>
+        <p:nvSpPr>
+          <p:cNvPr id="4" name="Slide Number Placeholder 3"/>
+          <p:cNvSpPr>
+            <a:spLocks noGrp="1"/>
+          </p:cNvSpPr>
+          <p:nvPr>
+            <p:ph type="sldNum" sz="quarter" idx="5"/>
+          </p:nvPr>
+        </p:nvSpPr>
+        <p:spPr/>
+        <p:txBody>
+          <a:bodyPr/>
+          <a:lstStyle/>
+          <a:p>
+            <a:fld id="{A5FAE774-3C86-4ADB-B2ED-16D6A179F828}" type="slidenum">
+              <a:rPr lang="en-US" smtClean="0"/>
+              <a:t>3</a:t>
+            </a:fld>
+            <a:endParaRPr lang="en-US"/>
+          </a:p>
+        </p:txBody>
+      </p:sp>
+    </p:spTree>
+    <p:extLst>
+      <p:ext uri="{BB962C8B-B14F-4D97-AF65-F5344CB8AC3E}">
+        <p14:creationId xmlns:p14="http://schemas.microsoft.com/office/powerpoint/2010/main" val="3382167490"/>
+      </p:ext>
+    </p:extLst>
+  </p:cSld>
+  <p:clrMapOvr>
+    <a:masterClrMapping/>
+  </p:clrMapOvr>
+</p:notes>
+</file>
+
+<file path=ppt/notesSlides/notesSlide4.xml><?xml version="1.0" encoding="utf-8"?>
+<p:notes xmlns:a="http://schemas.openxmlformats.org/drawingml/2006/main" xmlns:r="http://schemas.openxmlformats.org/officeDocument/2006/relationships" xmlns:p="http://schemas.openxmlformats.org/presentationml/2006/main">
+  <p:cSld>
+    <p:spTree>
+      <p:nvGrpSpPr>
+        <p:cNvPr id="1" name=""/>
+        <p:cNvGrpSpPr/>
+        <p:nvPr/>
+      </p:nvGrpSpPr>
+      <p:grpSpPr>
+        <a:xfrm>
+          <a:off x="0" y="0"/>
+          <a:ext cx="0" cy="0"/>
+          <a:chOff x="0" y="0"/>
+          <a:chExt cx="0" cy="0"/>
+        </a:xfrm>
+      </p:grpSpPr>
+      <p:sp>
+        <p:nvSpPr>
+          <p:cNvPr id="2" name="Slide Image Placeholder 1"/>
+          <p:cNvSpPr>
+            <a:spLocks noGrp="1" noRot="1" noChangeAspect="1"/>
+          </p:cNvSpPr>
+          <p:nvPr>
+            <p:ph type="sldImg"/>
+          </p:nvPr>
+        </p:nvSpPr>
+        <p:spPr/>
+      </p:sp>
+      <p:sp>
+        <p:nvSpPr>
+          <p:cNvPr id="3" name="Notes Placeholder 2"/>
+          <p:cNvSpPr>
+            <a:spLocks noGrp="1"/>
+          </p:cNvSpPr>
+          <p:nvPr>
+            <p:ph type="body" idx="1"/>
+          </p:nvPr>
+        </p:nvSpPr>
+        <p:spPr/>
+        <p:txBody>
+          <a:bodyPr/>
+          <a:lstStyle/>
+          <a:p>
+            <a:r>
+              <a:rPr lang="en-US" dirty="0"/>
+              <a:t>Kaylee</a:t>
+            </a:r>
+          </a:p>
+        </p:txBody>
+      </p:sp>
+      <p:sp>
+        <p:nvSpPr>
+          <p:cNvPr id="4" name="Slide Number Placeholder 3"/>
+          <p:cNvSpPr>
+            <a:spLocks noGrp="1"/>
+          </p:cNvSpPr>
+          <p:nvPr>
+            <p:ph type="sldNum" sz="quarter" idx="5"/>
+          </p:nvPr>
+        </p:nvSpPr>
+        <p:spPr/>
+        <p:txBody>
+          <a:bodyPr/>
+          <a:lstStyle/>
+          <a:p>
+            <a:fld id="{A5FAE774-3C86-4ADB-B2ED-16D6A179F828}" type="slidenum">
+              <a:rPr lang="en-US" smtClean="0"/>
+              <a:t>4</a:t>
+            </a:fld>
+            <a:endParaRPr lang="en-US"/>
+          </a:p>
+        </p:txBody>
+      </p:sp>
+    </p:spTree>
+    <p:extLst>
+      <p:ext uri="{BB962C8B-B14F-4D97-AF65-F5344CB8AC3E}">
+        <p14:creationId xmlns:p14="http://schemas.microsoft.com/office/powerpoint/2010/main" val="2328618702"/>
+      </p:ext>
+    </p:extLst>
+  </p:cSld>
+  <p:clrMapOvr>
+    <a:masterClrMapping/>
+  </p:clrMapOvr>
+</p:notes>
+</file>
+
+<file path=ppt/notesSlides/notesSlide5.xml><?xml version="1.0" encoding="utf-8"?>
+<p:notes xmlns:a="http://schemas.openxmlformats.org/drawingml/2006/main" xmlns:r="http://schemas.openxmlformats.org/officeDocument/2006/relationships" xmlns:p="http://schemas.openxmlformats.org/presentationml/2006/main">
+  <p:cSld>
+    <p:spTree>
+      <p:nvGrpSpPr>
+        <p:cNvPr id="1" name=""/>
+        <p:cNvGrpSpPr/>
+        <p:nvPr/>
+      </p:nvGrpSpPr>
+      <p:grpSpPr>
+        <a:xfrm>
+          <a:off x="0" y="0"/>
+          <a:ext cx="0" cy="0"/>
+          <a:chOff x="0" y="0"/>
+          <a:chExt cx="0" cy="0"/>
+        </a:xfrm>
+      </p:grpSpPr>
+      <p:sp>
+        <p:nvSpPr>
+          <p:cNvPr id="2" name="Slide Image Placeholder 1"/>
+          <p:cNvSpPr>
+            <a:spLocks noGrp="1" noRot="1" noChangeAspect="1"/>
+          </p:cNvSpPr>
+          <p:nvPr>
+            <p:ph type="sldImg"/>
+          </p:nvPr>
+        </p:nvSpPr>
+        <p:spPr/>
+      </p:sp>
+      <p:sp>
+        <p:nvSpPr>
+          <p:cNvPr id="3" name="Notes Placeholder 2"/>
+          <p:cNvSpPr>
+            <a:spLocks noGrp="1"/>
+          </p:cNvSpPr>
+          <p:nvPr>
+            <p:ph type="body" idx="1"/>
+          </p:nvPr>
+        </p:nvSpPr>
+        <p:spPr/>
+        <p:txBody>
+          <a:bodyPr/>
+          <a:lstStyle/>
+          <a:p>
+            <a:pPr marL="0" marR="0" lvl="0" indent="0" algn="l" defTabSz="914400" rtl="0" eaLnBrk="1" fontAlgn="auto" latinLnBrk="0" hangingPunct="1">
+              <a:lnSpc>
+                <a:spcPct val="100000"/>
+              </a:lnSpc>
+              <a:spcBef>
+                <a:spcPts val="0"/>
+              </a:spcBef>
+              <a:spcAft>
+                <a:spcPts val="0"/>
+              </a:spcAft>
+              <a:buClrTx/>
+              <a:buSzTx/>
+              <a:buFontTx/>
+              <a:buNone/>
+              <a:tabLst/>
+              <a:defRPr/>
+            </a:pPr>
+            <a:r>
+              <a:rPr lang="en-US" dirty="0"/>
+              <a:t>Kaylee</a:t>
+            </a:r>
+          </a:p>
+          <a:p>
+            <a:endParaRPr lang="en-US" dirty="0"/>
+          </a:p>
+        </p:txBody>
+      </p:sp>
+      <p:sp>
+        <p:nvSpPr>
+          <p:cNvPr id="4" name="Slide Number Placeholder 3"/>
+          <p:cNvSpPr>
+            <a:spLocks noGrp="1"/>
+          </p:cNvSpPr>
+          <p:nvPr>
+            <p:ph type="sldNum" sz="quarter" idx="5"/>
+          </p:nvPr>
+        </p:nvSpPr>
+        <p:spPr/>
+        <p:txBody>
+          <a:bodyPr/>
+          <a:lstStyle/>
+          <a:p>
+            <a:fld id="{A5FAE774-3C86-4ADB-B2ED-16D6A179F828}" type="slidenum">
+              <a:rPr lang="en-US" smtClean="0"/>
               <a:t>5</a:t>
             </a:fld>
             <a:endParaRPr lang="en-US"/>
@@ -637,6 +1399,391 @@
     <p:extLst>
       <p:ext uri="{BB962C8B-B14F-4D97-AF65-F5344CB8AC3E}">
         <p14:creationId xmlns:p14="http://schemas.microsoft.com/office/powerpoint/2010/main" val="294807754"/>
+      </p:ext>
+    </p:extLst>
+  </p:cSld>
+  <p:clrMapOvr>
+    <a:masterClrMapping/>
+  </p:clrMapOvr>
+</p:notes>
+</file>
+
+<file path=ppt/notesSlides/notesSlide6.xml><?xml version="1.0" encoding="utf-8"?>
+<p:notes xmlns:a="http://schemas.openxmlformats.org/drawingml/2006/main" xmlns:r="http://schemas.openxmlformats.org/officeDocument/2006/relationships" xmlns:p="http://schemas.openxmlformats.org/presentationml/2006/main">
+  <p:cSld>
+    <p:spTree>
+      <p:nvGrpSpPr>
+        <p:cNvPr id="1" name=""/>
+        <p:cNvGrpSpPr/>
+        <p:nvPr/>
+      </p:nvGrpSpPr>
+      <p:grpSpPr>
+        <a:xfrm>
+          <a:off x="0" y="0"/>
+          <a:ext cx="0" cy="0"/>
+          <a:chOff x="0" y="0"/>
+          <a:chExt cx="0" cy="0"/>
+        </a:xfrm>
+      </p:grpSpPr>
+      <p:sp>
+        <p:nvSpPr>
+          <p:cNvPr id="2" name="Slide Image Placeholder 1"/>
+          <p:cNvSpPr>
+            <a:spLocks noGrp="1" noRot="1" noChangeAspect="1"/>
+          </p:cNvSpPr>
+          <p:nvPr>
+            <p:ph type="sldImg"/>
+          </p:nvPr>
+        </p:nvSpPr>
+        <p:spPr/>
+      </p:sp>
+      <p:sp>
+        <p:nvSpPr>
+          <p:cNvPr id="3" name="Notes Placeholder 2"/>
+          <p:cNvSpPr>
+            <a:spLocks noGrp="1"/>
+          </p:cNvSpPr>
+          <p:nvPr>
+            <p:ph type="body" idx="1"/>
+          </p:nvPr>
+        </p:nvSpPr>
+        <p:spPr/>
+        <p:txBody>
+          <a:bodyPr/>
+          <a:lstStyle/>
+          <a:p>
+            <a:pPr marL="0" marR="0" lvl="0" indent="0" algn="l" defTabSz="914400" rtl="0" eaLnBrk="1" fontAlgn="auto" latinLnBrk="0" hangingPunct="1">
+              <a:lnSpc>
+                <a:spcPct val="100000"/>
+              </a:lnSpc>
+              <a:spcBef>
+                <a:spcPts val="0"/>
+              </a:spcBef>
+              <a:spcAft>
+                <a:spcPts val="0"/>
+              </a:spcAft>
+              <a:buClrTx/>
+              <a:buSzTx/>
+              <a:buFontTx/>
+              <a:buNone/>
+              <a:tabLst/>
+              <a:defRPr/>
+            </a:pPr>
+            <a:r>
+              <a:rPr lang="en-US" dirty="0"/>
+              <a:t>Kaylee</a:t>
+            </a:r>
+          </a:p>
+          <a:p>
+            <a:endParaRPr lang="en-US" dirty="0"/>
+          </a:p>
+        </p:txBody>
+      </p:sp>
+      <p:sp>
+        <p:nvSpPr>
+          <p:cNvPr id="4" name="Slide Number Placeholder 3"/>
+          <p:cNvSpPr>
+            <a:spLocks noGrp="1"/>
+          </p:cNvSpPr>
+          <p:nvPr>
+            <p:ph type="sldNum" sz="quarter" idx="5"/>
+          </p:nvPr>
+        </p:nvSpPr>
+        <p:spPr/>
+        <p:txBody>
+          <a:bodyPr/>
+          <a:lstStyle/>
+          <a:p>
+            <a:fld id="{A5FAE774-3C86-4ADB-B2ED-16D6A179F828}" type="slidenum">
+              <a:rPr lang="en-US" smtClean="0"/>
+              <a:t>6</a:t>
+            </a:fld>
+            <a:endParaRPr lang="en-US"/>
+          </a:p>
+        </p:txBody>
+      </p:sp>
+    </p:spTree>
+    <p:extLst>
+      <p:ext uri="{BB962C8B-B14F-4D97-AF65-F5344CB8AC3E}">
+        <p14:creationId xmlns:p14="http://schemas.microsoft.com/office/powerpoint/2010/main" val="612988816"/>
+      </p:ext>
+    </p:extLst>
+  </p:cSld>
+  <p:clrMapOvr>
+    <a:masterClrMapping/>
+  </p:clrMapOvr>
+</p:notes>
+</file>
+
+<file path=ppt/notesSlides/notesSlide7.xml><?xml version="1.0" encoding="utf-8"?>
+<p:notes xmlns:a="http://schemas.openxmlformats.org/drawingml/2006/main" xmlns:r="http://schemas.openxmlformats.org/officeDocument/2006/relationships" xmlns:p="http://schemas.openxmlformats.org/presentationml/2006/main">
+  <p:cSld>
+    <p:spTree>
+      <p:nvGrpSpPr>
+        <p:cNvPr id="1" name=""/>
+        <p:cNvGrpSpPr/>
+        <p:nvPr/>
+      </p:nvGrpSpPr>
+      <p:grpSpPr>
+        <a:xfrm>
+          <a:off x="0" y="0"/>
+          <a:ext cx="0" cy="0"/>
+          <a:chOff x="0" y="0"/>
+          <a:chExt cx="0" cy="0"/>
+        </a:xfrm>
+      </p:grpSpPr>
+      <p:sp>
+        <p:nvSpPr>
+          <p:cNvPr id="2" name="Slide Image Placeholder 1"/>
+          <p:cNvSpPr>
+            <a:spLocks noGrp="1" noRot="1" noChangeAspect="1"/>
+          </p:cNvSpPr>
+          <p:nvPr>
+            <p:ph type="sldImg"/>
+          </p:nvPr>
+        </p:nvSpPr>
+        <p:spPr/>
+      </p:sp>
+      <p:sp>
+        <p:nvSpPr>
+          <p:cNvPr id="3" name="Notes Placeholder 2"/>
+          <p:cNvSpPr>
+            <a:spLocks noGrp="1"/>
+          </p:cNvSpPr>
+          <p:nvPr>
+            <p:ph type="body" idx="1"/>
+          </p:nvPr>
+        </p:nvSpPr>
+        <p:spPr/>
+        <p:txBody>
+          <a:bodyPr/>
+          <a:lstStyle/>
+          <a:p>
+            <a:pPr marL="0" marR="0" lvl="0" indent="0" algn="l" defTabSz="914400" rtl="0" eaLnBrk="1" fontAlgn="auto" latinLnBrk="0" hangingPunct="1">
+              <a:lnSpc>
+                <a:spcPct val="100000"/>
+              </a:lnSpc>
+              <a:spcBef>
+                <a:spcPts val="0"/>
+              </a:spcBef>
+              <a:spcAft>
+                <a:spcPts val="0"/>
+              </a:spcAft>
+              <a:buClrTx/>
+              <a:buSzTx/>
+              <a:buFontTx/>
+              <a:buNone/>
+              <a:tabLst/>
+              <a:defRPr/>
+            </a:pPr>
+            <a:r>
+              <a:rPr lang="en-US" dirty="0"/>
+              <a:t>Tadhg</a:t>
+            </a:r>
+          </a:p>
+        </p:txBody>
+      </p:sp>
+      <p:sp>
+        <p:nvSpPr>
+          <p:cNvPr id="4" name="Slide Number Placeholder 3"/>
+          <p:cNvSpPr>
+            <a:spLocks noGrp="1"/>
+          </p:cNvSpPr>
+          <p:nvPr>
+            <p:ph type="sldNum" sz="quarter" idx="5"/>
+          </p:nvPr>
+        </p:nvSpPr>
+        <p:spPr/>
+        <p:txBody>
+          <a:bodyPr/>
+          <a:lstStyle/>
+          <a:p>
+            <a:fld id="{A5FAE774-3C86-4ADB-B2ED-16D6A179F828}" type="slidenum">
+              <a:rPr lang="en-US" smtClean="0"/>
+              <a:t>7</a:t>
+            </a:fld>
+            <a:endParaRPr lang="en-US"/>
+          </a:p>
+        </p:txBody>
+      </p:sp>
+    </p:spTree>
+    <p:extLst>
+      <p:ext uri="{BB962C8B-B14F-4D97-AF65-F5344CB8AC3E}">
+        <p14:creationId xmlns:p14="http://schemas.microsoft.com/office/powerpoint/2010/main" val="743353725"/>
+      </p:ext>
+    </p:extLst>
+  </p:cSld>
+  <p:clrMapOvr>
+    <a:masterClrMapping/>
+  </p:clrMapOvr>
+</p:notes>
+</file>
+
+<file path=ppt/notesSlides/notesSlide8.xml><?xml version="1.0" encoding="utf-8"?>
+<p:notes xmlns:a="http://schemas.openxmlformats.org/drawingml/2006/main" xmlns:r="http://schemas.openxmlformats.org/officeDocument/2006/relationships" xmlns:p="http://schemas.openxmlformats.org/presentationml/2006/main">
+  <p:cSld>
+    <p:spTree>
+      <p:nvGrpSpPr>
+        <p:cNvPr id="1" name=""/>
+        <p:cNvGrpSpPr/>
+        <p:nvPr/>
+      </p:nvGrpSpPr>
+      <p:grpSpPr>
+        <a:xfrm>
+          <a:off x="0" y="0"/>
+          <a:ext cx="0" cy="0"/>
+          <a:chOff x="0" y="0"/>
+          <a:chExt cx="0" cy="0"/>
+        </a:xfrm>
+      </p:grpSpPr>
+      <p:sp>
+        <p:nvSpPr>
+          <p:cNvPr id="2" name="Slide Image Placeholder 1"/>
+          <p:cNvSpPr>
+            <a:spLocks noGrp="1" noRot="1" noChangeAspect="1"/>
+          </p:cNvSpPr>
+          <p:nvPr>
+            <p:ph type="sldImg"/>
+          </p:nvPr>
+        </p:nvSpPr>
+        <p:spPr/>
+      </p:sp>
+      <p:sp>
+        <p:nvSpPr>
+          <p:cNvPr id="3" name="Notes Placeholder 2"/>
+          <p:cNvSpPr>
+            <a:spLocks noGrp="1"/>
+          </p:cNvSpPr>
+          <p:nvPr>
+            <p:ph type="body" idx="1"/>
+          </p:nvPr>
+        </p:nvSpPr>
+        <p:spPr/>
+        <p:txBody>
+          <a:bodyPr/>
+          <a:lstStyle/>
+          <a:p>
+            <a:r>
+              <a:rPr lang="en-US" dirty="0"/>
+              <a:t>Tadhg</a:t>
+            </a:r>
+          </a:p>
+        </p:txBody>
+      </p:sp>
+      <p:sp>
+        <p:nvSpPr>
+          <p:cNvPr id="4" name="Slide Number Placeholder 3"/>
+          <p:cNvSpPr>
+            <a:spLocks noGrp="1"/>
+          </p:cNvSpPr>
+          <p:nvPr>
+            <p:ph type="sldNum" sz="quarter" idx="5"/>
+          </p:nvPr>
+        </p:nvSpPr>
+        <p:spPr/>
+        <p:txBody>
+          <a:bodyPr/>
+          <a:lstStyle/>
+          <a:p>
+            <a:fld id="{A5FAE774-3C86-4ADB-B2ED-16D6A179F828}" type="slidenum">
+              <a:rPr lang="en-US" smtClean="0"/>
+              <a:t>8</a:t>
+            </a:fld>
+            <a:endParaRPr lang="en-US"/>
+          </a:p>
+        </p:txBody>
+      </p:sp>
+    </p:spTree>
+    <p:extLst>
+      <p:ext uri="{BB962C8B-B14F-4D97-AF65-F5344CB8AC3E}">
+        <p14:creationId xmlns:p14="http://schemas.microsoft.com/office/powerpoint/2010/main" val="2063422772"/>
+      </p:ext>
+    </p:extLst>
+  </p:cSld>
+  <p:clrMapOvr>
+    <a:masterClrMapping/>
+  </p:clrMapOvr>
+</p:notes>
+</file>
+
+<file path=ppt/notesSlides/notesSlide9.xml><?xml version="1.0" encoding="utf-8"?>
+<p:notes xmlns:a="http://schemas.openxmlformats.org/drawingml/2006/main" xmlns:r="http://schemas.openxmlformats.org/officeDocument/2006/relationships" xmlns:p="http://schemas.openxmlformats.org/presentationml/2006/main">
+  <p:cSld>
+    <p:spTree>
+      <p:nvGrpSpPr>
+        <p:cNvPr id="1" name=""/>
+        <p:cNvGrpSpPr/>
+        <p:nvPr/>
+      </p:nvGrpSpPr>
+      <p:grpSpPr>
+        <a:xfrm>
+          <a:off x="0" y="0"/>
+          <a:ext cx="0" cy="0"/>
+          <a:chOff x="0" y="0"/>
+          <a:chExt cx="0" cy="0"/>
+        </a:xfrm>
+      </p:grpSpPr>
+      <p:sp>
+        <p:nvSpPr>
+          <p:cNvPr id="2" name="Slide Image Placeholder 1"/>
+          <p:cNvSpPr>
+            <a:spLocks noGrp="1" noRot="1" noChangeAspect="1"/>
+          </p:cNvSpPr>
+          <p:nvPr>
+            <p:ph type="sldImg"/>
+          </p:nvPr>
+        </p:nvSpPr>
+        <p:spPr/>
+      </p:sp>
+      <p:sp>
+        <p:nvSpPr>
+          <p:cNvPr id="3" name="Notes Placeholder 2"/>
+          <p:cNvSpPr>
+            <a:spLocks noGrp="1"/>
+          </p:cNvSpPr>
+          <p:nvPr>
+            <p:ph type="body" idx="1"/>
+          </p:nvPr>
+        </p:nvSpPr>
+        <p:spPr/>
+        <p:txBody>
+          <a:bodyPr/>
+          <a:lstStyle/>
+          <a:p>
+            <a:r>
+              <a:rPr lang="en-US" dirty="0"/>
+              <a:t>Kaylee</a:t>
+            </a:r>
+          </a:p>
+        </p:txBody>
+      </p:sp>
+      <p:sp>
+        <p:nvSpPr>
+          <p:cNvPr id="4" name="Slide Number Placeholder 3"/>
+          <p:cNvSpPr>
+            <a:spLocks noGrp="1"/>
+          </p:cNvSpPr>
+          <p:nvPr>
+            <p:ph type="sldNum" sz="quarter" idx="5"/>
+          </p:nvPr>
+        </p:nvSpPr>
+        <p:spPr/>
+        <p:txBody>
+          <a:bodyPr/>
+          <a:lstStyle/>
+          <a:p>
+            <a:fld id="{A5FAE774-3C86-4ADB-B2ED-16D6A179F828}" type="slidenum">
+              <a:rPr lang="en-US" smtClean="0"/>
+              <a:t>9</a:t>
+            </a:fld>
+            <a:endParaRPr lang="en-US"/>
+          </a:p>
+        </p:txBody>
+      </p:sp>
+    </p:spTree>
+    <p:extLst>
+      <p:ext uri="{BB962C8B-B14F-4D97-AF65-F5344CB8AC3E}">
+        <p14:creationId xmlns:p14="http://schemas.microsoft.com/office/powerpoint/2010/main" val="1724313035"/>
       </p:ext>
     </p:extLst>
   </p:cSld>
@@ -890,7 +2037,7 @@
           <a:p>
             <a:fld id="{9184DA70-C731-4C70-880D-CCD4705E623C}" type="datetime1">
               <a:rPr lang="en-US" smtClean="0"/>
-              <a:t>7/13/2025</a:t>
+              <a:t>7/14/25</a:t>
             </a:fld>
             <a:endParaRPr lang="en-US" dirty="0"/>
           </a:p>
@@ -1078,7 +2225,7 @@
           <a:p>
             <a:fld id="{B612A279-0833-481D-8C56-F67FD0AC6C50}" type="datetime1">
               <a:rPr lang="en-US" smtClean="0"/>
-              <a:t>7/13/2025</a:t>
+              <a:t>7/14/25</a:t>
             </a:fld>
             <a:endParaRPr lang="en-US" dirty="0"/>
           </a:p>
@@ -1320,7 +2467,7 @@
           <a:p>
             <a:fld id="{6587DA83-5663-4C9C-B9AA-0B40A3DAFF81}" type="datetime1">
               <a:rPr lang="en-US" smtClean="0"/>
-              <a:t>7/13/2025</a:t>
+              <a:t>7/14/25</a:t>
             </a:fld>
             <a:endParaRPr lang="en-US" dirty="0"/>
           </a:p>
@@ -1508,7 +2655,7 @@
           <a:p>
             <a:fld id="{4BE1D723-8F53-4F53-90B0-1982A396982E}" type="datetime1">
               <a:rPr lang="en-US" smtClean="0"/>
-              <a:t>7/13/2025</a:t>
+              <a:t>7/14/25</a:t>
             </a:fld>
             <a:endParaRPr lang="en-US" dirty="0"/>
           </a:p>
@@ -1881,7 +3028,7 @@
           <a:p>
             <a:fld id="{97669AF7-7BEB-44E4-9852-375E34362B5B}" type="datetime1">
               <a:rPr lang="en-US" smtClean="0"/>
-              <a:t>7/13/2025</a:t>
+              <a:t>7/14/25</a:t>
             </a:fld>
             <a:endParaRPr lang="en-US" dirty="0"/>
           </a:p>
@@ -2136,7 +3283,7 @@
           <a:p>
             <a:fld id="{BAAAC38D-0552-4C82-B593-E6124DFADBE2}" type="datetime1">
               <a:rPr lang="en-US" smtClean="0"/>
-              <a:t>7/13/2025</a:t>
+              <a:t>7/14/25</a:t>
             </a:fld>
             <a:endParaRPr lang="en-US" dirty="0"/>
           </a:p>
@@ -2533,7 +3680,7 @@
           <a:p>
             <a:fld id="{D9DF0F1C-5577-4ACB-BB62-DF8F3C494C7E}" type="datetime1">
               <a:rPr lang="en-US" smtClean="0"/>
-              <a:t>7/13/2025</a:t>
+              <a:t>7/14/25</a:t>
             </a:fld>
             <a:endParaRPr lang="en-US" dirty="0"/>
           </a:p>
@@ -2669,7 +3816,7 @@
           <a:p>
             <a:fld id="{1775B394-D9F9-4F0C-B15D-605F45CB9E9F}" type="datetime1">
               <a:rPr lang="en-US" smtClean="0"/>
-              <a:t>7/13/2025</a:t>
+              <a:t>7/14/25</a:t>
             </a:fld>
             <a:endParaRPr lang="en-US" dirty="0"/>
           </a:p>
@@ -2826,7 +3973,7 @@
           <a:p>
             <a:fld id="{39667345-2558-425A-8533-9BFDBCE15005}" type="datetime1">
               <a:rPr lang="en-US" smtClean="0"/>
-              <a:t>7/13/2025</a:t>
+              <a:t>7/14/25</a:t>
             </a:fld>
             <a:endParaRPr lang="en-US" dirty="0"/>
           </a:p>
@@ -3155,7 +4302,7 @@
           <a:p>
             <a:fld id="{92BEA474-078D-4E9B-9B14-09A87B19DC46}" type="datetime1">
               <a:rPr lang="en-US" smtClean="0"/>
-              <a:t>7/13/2025</a:t>
+              <a:t>7/14/25</a:t>
             </a:fld>
             <a:endParaRPr lang="en-US" dirty="0"/>
           </a:p>
@@ -3505,7 +4652,7 @@
           <a:p>
             <a:fld id="{4907D986-8816-4272-A432-0437A28A9828}" type="datetime1">
               <a:rPr lang="en-US" smtClean="0"/>
-              <a:t>7/13/2025</a:t>
+              <a:t>7/14/25</a:t>
             </a:fld>
             <a:endParaRPr lang="en-US" dirty="0"/>
           </a:p>
@@ -3766,7 +4913,7 @@
           <a:p>
             <a:fld id="{62D6E202-B606-4609-B914-27C9371A1F6D}" type="datetime1">
               <a:rPr lang="en-US" smtClean="0"/>
-              <a:t>7/13/2025</a:t>
+              <a:t>7/14/25</a:t>
             </a:fld>
             <a:endParaRPr lang="en-US" dirty="0"/>
           </a:p>
@@ -4401,7 +5548,7 @@
           <p:nvPr/>
         </p:nvPicPr>
         <p:blipFill>
-          <a:blip r:embed="rId2">
+          <a:blip r:embed="rId3">
             <a:extLst>
               <a:ext uri="{28A0092B-C50C-407E-A947-70E740481C1C}">
                 <a14:useLocalDpi xmlns:a14="http://schemas.microsoft.com/office/drawing/2010/main" val="0"/>
@@ -4790,7 +5937,7 @@
           <p:nvPr/>
         </p:nvPicPr>
         <p:blipFill>
-          <a:blip r:embed="rId2"/>
+          <a:blip r:embed="rId3"/>
           <a:stretch>
             <a:fillRect/>
           </a:stretch>
@@ -4820,7 +5967,7 @@
           <p:nvPr/>
         </p:nvPicPr>
         <p:blipFill>
-          <a:blip r:embed="rId3"/>
+          <a:blip r:embed="rId4"/>
           <a:stretch>
             <a:fillRect/>
           </a:stretch>
@@ -4850,7 +5997,7 @@
           <p:nvPr/>
         </p:nvPicPr>
         <p:blipFill>
-          <a:blip r:embed="rId4"/>
+          <a:blip r:embed="rId5"/>
           <a:stretch>
             <a:fillRect/>
           </a:stretch>
@@ -4974,7 +6121,7 @@
           <p:nvPr/>
         </p:nvPicPr>
         <p:blipFill>
-          <a:blip r:embed="rId5"/>
+          <a:blip r:embed="rId6"/>
           <a:stretch>
             <a:fillRect/>
           </a:stretch>
@@ -5004,7 +6151,7 @@
           <p:nvPr/>
         </p:nvPicPr>
         <p:blipFill>
-          <a:blip r:embed="rId6"/>
+          <a:blip r:embed="rId7"/>
           <a:stretch>
             <a:fillRect/>
           </a:stretch>
@@ -5882,7 +7029,7 @@
           <p:nvPr/>
         </p:nvPicPr>
         <p:blipFill>
-          <a:blip r:embed="rId2">
+          <a:blip r:embed="rId3">
             <a:extLst>
               <a:ext uri="{28A0092B-C50C-407E-A947-70E740481C1C}">
                 <a14:useLocalDpi xmlns:a14="http://schemas.microsoft.com/office/drawing/2010/main" val="0"/>
@@ -5920,7 +7067,7 @@
           </p:nvPr>
         </p:nvPicPr>
         <p:blipFill>
-          <a:blip r:embed="rId3">
+          <a:blip r:embed="rId4">
             <a:extLst>
               <a:ext uri="{28A0092B-C50C-407E-A947-70E740481C1C}">
                 <a14:useLocalDpi xmlns:a14="http://schemas.microsoft.com/office/drawing/2010/main" val="0"/>
@@ -7065,7 +8212,7 @@
           </p:nvPr>
         </p:nvPicPr>
         <p:blipFill>
-          <a:blip r:embed="rId2">
+          <a:blip r:embed="rId3">
             <a:extLst>
               <a:ext uri="{28A0092B-C50C-407E-A947-70E740481C1C}">
                 <a14:useLocalDpi xmlns:a14="http://schemas.microsoft.com/office/drawing/2010/main" val="0"/>
@@ -7098,7 +8245,7 @@
           <p:nvPr/>
         </p:nvPicPr>
         <p:blipFill>
-          <a:blip r:embed="rId3">
+          <a:blip r:embed="rId4">
             <a:extLst>
               <a:ext uri="{28A0092B-C50C-407E-A947-70E740481C1C}">
                 <a14:useLocalDpi xmlns:a14="http://schemas.microsoft.com/office/drawing/2010/main" val="0"/>
@@ -8772,7 +9919,7 @@
           <p:nvPr/>
         </p:nvPicPr>
         <p:blipFill>
-          <a:blip r:embed="rId2"/>
+          <a:blip r:embed="rId3"/>
           <a:stretch>
             <a:fillRect/>
           </a:stretch>
@@ -8802,7 +9949,7 @@
           <p:nvPr/>
         </p:nvPicPr>
         <p:blipFill>
-          <a:blip r:embed="rId3"/>
+          <a:blip r:embed="rId4"/>
           <a:srcRect t="2557"/>
           <a:stretch>
             <a:fillRect/>
@@ -8833,7 +9980,7 @@
           <p:nvPr/>
         </p:nvPicPr>
         <p:blipFill>
-          <a:blip r:embed="rId4"/>
+          <a:blip r:embed="rId5"/>
           <a:stretch>
             <a:fillRect/>
           </a:stretch>
@@ -10098,7 +11245,7 @@
           <p:nvPr/>
         </p:nvPicPr>
         <p:blipFill>
-          <a:blip r:embed="rId2">
+          <a:blip r:embed="rId3">
             <a:extLst>
               <a:ext uri="{28A0092B-C50C-407E-A947-70E740481C1C}">
                 <a14:useLocalDpi xmlns:a14="http://schemas.microsoft.com/office/drawing/2010/main" val="0"/>
@@ -10239,7 +11386,7 @@
                 <a:solidFill>
                   <a:schemeClr val="tx1"/>
                 </a:solidFill>
-                <a:hlinkClick r:id="rId3"/>
+                <a:hlinkClick r:id="rId4"/>
               </a:rPr>
               <a:t>https://www.vecteezy.com/free-vector/healthy-sick</a:t>
             </a:r>
@@ -10256,7 +11403,7 @@
                 <a:solidFill>
                   <a:schemeClr val="tx1"/>
                 </a:solidFill>
-                <a:hlinkClick r:id="rId4"/>
+                <a:hlinkClick r:id="rId5"/>
               </a:rPr>
               <a:t>https://www.istockphoto.com/illustrations/scale</a:t>
             </a:r>
@@ -10336,7 +11483,7 @@
           <p:nvPr/>
         </p:nvPicPr>
         <p:blipFill>
-          <a:blip r:embed="rId5">
+          <a:blip r:embed="rId6">
             <a:extLst>
               <a:ext uri="{28A0092B-C50C-407E-A947-70E740481C1C}">
                 <a14:useLocalDpi xmlns:a14="http://schemas.microsoft.com/office/drawing/2010/main" val="0"/>
@@ -10383,10 +11530,10 @@
           <p:nvPr/>
         </p:nvPicPr>
         <p:blipFill>
-          <a:blip r:embed="rId6">
+          <a:blip r:embed="rId7">
             <a:extLst>
               <a:ext uri="{96DAC541-7B7A-43D3-8B79-37D633B846F1}">
-                <asvg:svgBlip xmlns:asvg="http://schemas.microsoft.com/office/drawing/2016/SVG/main" r:embed="rId7"/>
+                <asvg:svgBlip xmlns:asvg="http://schemas.microsoft.com/office/drawing/2016/SVG/main" r:embed="rId8"/>
               </a:ext>
             </a:extLst>
           </a:blip>
@@ -10597,7 +11744,7 @@
           <p:nvPr/>
         </p:nvPicPr>
         <p:blipFill>
-          <a:blip r:embed="rId2"/>
+          <a:blip r:embed="rId3"/>
           <a:srcRect t="23762"/>
           <a:stretch>
             <a:fillRect/>
@@ -10628,7 +11775,7 @@
           <p:nvPr/>
         </p:nvPicPr>
         <p:blipFill>
-          <a:blip r:embed="rId3">
+          <a:blip r:embed="rId4">
             <a:extLst>
               <a:ext uri="{28A0092B-C50C-407E-A947-70E740481C1C}">
                 <a14:useLocalDpi xmlns:a14="http://schemas.microsoft.com/office/drawing/2010/main" val="0"/>
@@ -10940,7 +12087,7 @@
           <p:nvPr/>
         </p:nvPicPr>
         <p:blipFill>
-          <a:blip r:embed="rId4"/>
+          <a:blip r:embed="rId5"/>
           <a:stretch>
             <a:fillRect/>
           </a:stretch>
@@ -12327,7 +13474,7 @@
             <p:nvPr/>
           </p:nvPicPr>
           <p:blipFill>
-            <a:blip r:embed="rId2"/>
+            <a:blip r:embed="rId3"/>
             <a:stretch>
               <a:fillRect/>
             </a:stretch>
@@ -12357,7 +13504,7 @@
             <p:nvPr/>
           </p:nvPicPr>
           <p:blipFill>
-            <a:blip r:embed="rId3"/>
+            <a:blip r:embed="rId4"/>
             <a:srcRect b="24183"/>
             <a:stretch>
               <a:fillRect/>
@@ -12389,7 +13536,7 @@
           <p:nvPr/>
         </p:nvPicPr>
         <p:blipFill>
-          <a:blip r:embed="rId4"/>
+          <a:blip r:embed="rId5"/>
           <a:stretch>
             <a:fillRect/>
           </a:stretch>
@@ -12465,7 +13612,7 @@
           <p:nvPr/>
         </p:nvPicPr>
         <p:blipFill>
-          <a:blip r:embed="rId5"/>
+          <a:blip r:embed="rId6"/>
           <a:srcRect t="23762"/>
           <a:stretch>
             <a:fillRect/>
@@ -12496,7 +13643,7 @@
           <p:nvPr/>
         </p:nvPicPr>
         <p:blipFill>
-          <a:blip r:embed="rId6"/>
+          <a:blip r:embed="rId7"/>
           <a:stretch>
             <a:fillRect/>
           </a:stretch>
@@ -13181,7 +14328,7 @@
           <p:nvPr/>
         </p:nvPicPr>
         <p:blipFill>
-          <a:blip r:embed="rId2"/>
+          <a:blip r:embed="rId3"/>
           <a:srcRect t="10043"/>
           <a:stretch>
             <a:fillRect/>
@@ -13520,7 +14667,7 @@
           <p:nvPr/>
         </p:nvPicPr>
         <p:blipFill>
-          <a:blip r:embed="rId3"/>
+          <a:blip r:embed="rId4"/>
           <a:stretch>
             <a:fillRect/>
           </a:stretch>
@@ -14199,7 +15346,7 @@
           </p:nvPr>
         </p:nvPicPr>
         <p:blipFill>
-          <a:blip r:embed="rId2">
+          <a:blip r:embed="rId3">
             <a:extLst>
               <a:ext uri="{28A0092B-C50C-407E-A947-70E740481C1C}">
                 <a14:useLocalDpi xmlns:a14="http://schemas.microsoft.com/office/drawing/2010/main" val="0"/>
@@ -14232,7 +15379,7 @@
           <p:nvPr/>
         </p:nvPicPr>
         <p:blipFill>
-          <a:blip r:embed="rId3">
+          <a:blip r:embed="rId4">
             <a:extLst>
               <a:ext uri="{28A0092B-C50C-407E-A947-70E740481C1C}">
                 <a14:useLocalDpi xmlns:a14="http://schemas.microsoft.com/office/drawing/2010/main" val="0"/>
@@ -14268,7 +15415,7 @@
           <p:nvPr/>
         </p:nvPicPr>
         <p:blipFill>
-          <a:blip r:embed="rId4">
+          <a:blip r:embed="rId5">
             <a:extLst>
               <a:ext uri="{28A0092B-C50C-407E-A947-70E740481C1C}">
                 <a14:useLocalDpi xmlns:a14="http://schemas.microsoft.com/office/drawing/2010/main" val="0"/>

--- a/Group Project 1/Expansion of the Epidemic Model and Economic Analysis.pptx
+++ b/Group Project 1/Expansion of the Epidemic Model and Economic Analysis.pptx
@@ -211,7 +211,7 @@
           <a:p>
             <a:fld id="{1F07C78D-91C6-46E5-A984-A680DCBF6357}" type="datetimeFigureOut">
               <a:rPr lang="en-US" smtClean="0"/>
-              <a:t>7/14/2025</a:t>
+              <a:t>7/19/25</a:t>
             </a:fld>
             <a:endParaRPr lang="en-US"/>
           </a:p>
@@ -2024,7 +2024,7 @@
           <a:p>
             <a:fld id="{9184DA70-C731-4C70-880D-CCD4705E623C}" type="datetime1">
               <a:rPr lang="en-US" smtClean="0"/>
-              <a:t>7/14/2025</a:t>
+              <a:t>7/19/25</a:t>
             </a:fld>
             <a:endParaRPr lang="en-US" dirty="0"/>
           </a:p>
@@ -2212,7 +2212,7 @@
           <a:p>
             <a:fld id="{B612A279-0833-481D-8C56-F67FD0AC6C50}" type="datetime1">
               <a:rPr lang="en-US" smtClean="0"/>
-              <a:t>7/14/2025</a:t>
+              <a:t>7/19/25</a:t>
             </a:fld>
             <a:endParaRPr lang="en-US" dirty="0"/>
           </a:p>
@@ -2454,7 +2454,7 @@
           <a:p>
             <a:fld id="{6587DA83-5663-4C9C-B9AA-0B40A3DAFF81}" type="datetime1">
               <a:rPr lang="en-US" smtClean="0"/>
-              <a:t>7/14/2025</a:t>
+              <a:t>7/19/25</a:t>
             </a:fld>
             <a:endParaRPr lang="en-US" dirty="0"/>
           </a:p>
@@ -2642,7 +2642,7 @@
           <a:p>
             <a:fld id="{4BE1D723-8F53-4F53-90B0-1982A396982E}" type="datetime1">
               <a:rPr lang="en-US" smtClean="0"/>
-              <a:t>7/14/2025</a:t>
+              <a:t>7/19/25</a:t>
             </a:fld>
             <a:endParaRPr lang="en-US" dirty="0"/>
           </a:p>
@@ -3015,7 +3015,7 @@
           <a:p>
             <a:fld id="{97669AF7-7BEB-44E4-9852-375E34362B5B}" type="datetime1">
               <a:rPr lang="en-US" smtClean="0"/>
-              <a:t>7/14/2025</a:t>
+              <a:t>7/19/25</a:t>
             </a:fld>
             <a:endParaRPr lang="en-US" dirty="0"/>
           </a:p>
@@ -3270,7 +3270,7 @@
           <a:p>
             <a:fld id="{BAAAC38D-0552-4C82-B593-E6124DFADBE2}" type="datetime1">
               <a:rPr lang="en-US" smtClean="0"/>
-              <a:t>7/14/2025</a:t>
+              <a:t>7/19/25</a:t>
             </a:fld>
             <a:endParaRPr lang="en-US" dirty="0"/>
           </a:p>
@@ -3667,7 +3667,7 @@
           <a:p>
             <a:fld id="{D9DF0F1C-5577-4ACB-BB62-DF8F3C494C7E}" type="datetime1">
               <a:rPr lang="en-US" smtClean="0"/>
-              <a:t>7/14/2025</a:t>
+              <a:t>7/19/25</a:t>
             </a:fld>
             <a:endParaRPr lang="en-US" dirty="0"/>
           </a:p>
@@ -3803,7 +3803,7 @@
           <a:p>
             <a:fld id="{1775B394-D9F9-4F0C-B15D-605F45CB9E9F}" type="datetime1">
               <a:rPr lang="en-US" smtClean="0"/>
-              <a:t>7/14/2025</a:t>
+              <a:t>7/19/25</a:t>
             </a:fld>
             <a:endParaRPr lang="en-US" dirty="0"/>
           </a:p>
@@ -3960,7 +3960,7 @@
           <a:p>
             <a:fld id="{39667345-2558-425A-8533-9BFDBCE15005}" type="datetime1">
               <a:rPr lang="en-US" smtClean="0"/>
-              <a:t>7/14/2025</a:t>
+              <a:t>7/19/25</a:t>
             </a:fld>
             <a:endParaRPr lang="en-US" dirty="0"/>
           </a:p>
@@ -4289,7 +4289,7 @@
           <a:p>
             <a:fld id="{92BEA474-078D-4E9B-9B14-09A87B19DC46}" type="datetime1">
               <a:rPr lang="en-US" smtClean="0"/>
-              <a:t>7/14/2025</a:t>
+              <a:t>7/19/25</a:t>
             </a:fld>
             <a:endParaRPr lang="en-US" dirty="0"/>
           </a:p>
@@ -4639,7 +4639,7 @@
           <a:p>
             <a:fld id="{4907D986-8816-4272-A432-0437A28A9828}" type="datetime1">
               <a:rPr lang="en-US" smtClean="0"/>
-              <a:t>7/14/2025</a:t>
+              <a:t>7/19/25</a:t>
             </a:fld>
             <a:endParaRPr lang="en-US" dirty="0"/>
           </a:p>
@@ -4900,7 +4900,7 @@
           <a:p>
             <a:fld id="{62D6E202-B606-4609-B914-27C9371A1F6D}" type="datetime1">
               <a:rPr lang="en-US" smtClean="0"/>
-              <a:t>7/14/2025</a:t>
+              <a:t>7/19/25</a:t>
             </a:fld>
             <a:endParaRPr lang="en-US" dirty="0"/>
           </a:p>
@@ -13615,36 +13615,6 @@
           </a:prstGeom>
         </p:spPr>
       </p:pic>
-      <p:pic>
-        <p:nvPicPr>
-          <p:cNvPr id="1027" name="Picture 1026">
-            <a:extLst>
-              <a:ext uri="{FF2B5EF4-FFF2-40B4-BE49-F238E27FC236}">
-                <a16:creationId xmlns:a16="http://schemas.microsoft.com/office/drawing/2014/main" id="{711B10D4-B71D-9E57-3329-9754837F7EC1}"/>
-              </a:ext>
-            </a:extLst>
-          </p:cNvPr>
-          <p:cNvPicPr>
-            <a:picLocks noChangeAspect="1"/>
-          </p:cNvPicPr>
-          <p:nvPr/>
-        </p:nvPicPr>
-        <p:blipFill>
-          <a:blip r:embed="rId7"/>
-          <a:stretch>
-            <a:fillRect/>
-          </a:stretch>
-        </p:blipFill>
-        <p:spPr>
-          <a:xfrm>
-            <a:off x="7536687" y="2915882"/>
-            <a:ext cx="2556203" cy="433018"/>
-          </a:xfrm>
-          <a:prstGeom prst="rect">
-            <a:avLst/>
-          </a:prstGeom>
-        </p:spPr>
-      </p:pic>
       <p:sp>
         <p:nvSpPr>
           <p:cNvPr id="1028" name="Content Placeholder 2">
@@ -14197,6 +14167,36 @@
           </a:p>
         </p:txBody>
       </p:sp>
+      <p:pic>
+        <p:nvPicPr>
+          <p:cNvPr id="3" name="Picture 2">
+            <a:extLst>
+              <a:ext uri="{FF2B5EF4-FFF2-40B4-BE49-F238E27FC236}">
+                <a16:creationId xmlns:a16="http://schemas.microsoft.com/office/drawing/2014/main" id="{DA2BA35A-27FA-769A-0F9B-8A3C1F3B9899}"/>
+              </a:ext>
+            </a:extLst>
+          </p:cNvPr>
+          <p:cNvPicPr>
+            <a:picLocks noChangeAspect="1"/>
+          </p:cNvPicPr>
+          <p:nvPr/>
+        </p:nvPicPr>
+        <p:blipFill>
+          <a:blip r:embed="rId7"/>
+          <a:stretch>
+            <a:fillRect/>
+          </a:stretch>
+        </p:blipFill>
+        <p:spPr>
+          <a:xfrm>
+            <a:off x="6247285" y="2907246"/>
+            <a:ext cx="5135005" cy="412300"/>
+          </a:xfrm>
+          <a:prstGeom prst="rect">
+            <a:avLst/>
+          </a:prstGeom>
+        </p:spPr>
+      </p:pic>
     </p:spTree>
     <p:extLst>
       <p:ext uri="{BB962C8B-B14F-4D97-AF65-F5344CB8AC3E}">
